--- a/HLLP/1-cpp-introduction.pptx
+++ b/HLLP/1-cpp-introduction.pptx
@@ -37,9 +37,9 @@
     <p:sldId id="1055" r:id="rId25"/>
     <p:sldId id="1056" r:id="rId26"/>
     <p:sldId id="1057" r:id="rId27"/>
-    <p:sldId id="915" r:id="rId28"/>
-    <p:sldId id="974" r:id="rId29"/>
-    <p:sldId id="1038" r:id="rId30"/>
+    <p:sldId id="1058" r:id="rId28"/>
+    <p:sldId id="915" r:id="rId29"/>
+    <p:sldId id="974" r:id="rId30"/>
   </p:sldIdLst>
   <p:sldSz cx="12192000" cy="6858000"/>
   <p:notesSz cx="6757988" cy="9866313"/>
@@ -2907,7 +2907,12 @@
             <p:ph type="sldImg"/>
           </p:nvPr>
         </p:nvSpPr>
-        <p:spPr/>
+        <p:spPr>
+          <a:xfrm>
+            <a:off x="139700" y="762000"/>
+            <a:ext cx="6502400" cy="3657600"/>
+          </a:xfrm>
+        </p:spPr>
       </p:sp>
       <p:sp>
         <p:nvSpPr>
@@ -2935,7 +2940,7 @@
             <a:spLocks noGrp="1"/>
           </p:cNvSpPr>
           <p:nvPr>
-            <p:ph type="sldNum" sz="quarter" idx="5"/>
+            <p:ph type="sldNum" sz="quarter" idx="10"/>
           </p:nvPr>
         </p:nvSpPr>
         <p:spPr/>
@@ -2960,7 +2965,7 @@
     </p:spTree>
     <p:extLst>
       <p:ext uri="{BB962C8B-B14F-4D97-AF65-F5344CB8AC3E}">
-        <p14:creationId xmlns:p14="http://schemas.microsoft.com/office/powerpoint/2010/main" val="309301061"/>
+        <p14:creationId xmlns:p14="http://schemas.microsoft.com/office/powerpoint/2010/main" val="1968956453"/>
       </p:ext>
     </p:extLst>
   </p:cSld>
@@ -2997,12 +3002,7 @@
             <p:ph type="sldImg"/>
           </p:nvPr>
         </p:nvSpPr>
-        <p:spPr>
-          <a:xfrm>
-            <a:off x="139700" y="762000"/>
-            <a:ext cx="6502400" cy="3657600"/>
-          </a:xfrm>
-        </p:spPr>
+        <p:spPr/>
       </p:sp>
       <p:sp>
         <p:nvSpPr>
@@ -3030,7 +3030,7 @@
             <a:spLocks noGrp="1"/>
           </p:cNvSpPr>
           <p:nvPr>
-            <p:ph type="sldNum" sz="quarter" idx="10"/>
+            <p:ph type="sldNum" sz="quarter" idx="5"/>
           </p:nvPr>
         </p:nvSpPr>
         <p:spPr/>
@@ -3046,7 +3046,7 @@
               <a:pPr>
                 <a:defRPr/>
               </a:pPr>
-              <a:t>29</a:t>
+              <a:t>28</a:t>
             </a:fld>
             <a:endParaRPr lang="en-US" altLang="zh-CN"/>
           </a:p>
@@ -3055,7 +3055,7 @@
     </p:spTree>
     <p:extLst>
       <p:ext uri="{BB962C8B-B14F-4D97-AF65-F5344CB8AC3E}">
-        <p14:creationId xmlns:p14="http://schemas.microsoft.com/office/powerpoint/2010/main" val="751792741"/>
+        <p14:creationId xmlns:p14="http://schemas.microsoft.com/office/powerpoint/2010/main" val="309301061"/>
       </p:ext>
     </p:extLst>
   </p:cSld>
@@ -4014,7 +4014,7 @@
           <a:p>
             <a:fld id="{C764DE79-268F-4C1A-8933-263129D2AF90}" type="datetimeFigureOut">
               <a:rPr lang="en-US" dirty="0"/>
-              <a:t>9/7/2025</a:t>
+              <a:t>8/30/2026</a:t>
             </a:fld>
             <a:endParaRPr lang="en-US" dirty="0"/>
           </a:p>
@@ -4194,7 +4194,7 @@
           <a:p>
             <a:fld id="{C764DE79-268F-4C1A-8933-263129D2AF90}" type="datetimeFigureOut">
               <a:rPr lang="en-US" dirty="0"/>
-              <a:t>9/7/2025</a:t>
+              <a:t>8/30/2026</a:t>
             </a:fld>
             <a:endParaRPr lang="en-US" dirty="0"/>
           </a:p>
@@ -4384,7 +4384,7 @@
           <a:p>
             <a:fld id="{C764DE79-268F-4C1A-8933-263129D2AF90}" type="datetimeFigureOut">
               <a:rPr lang="en-US" dirty="0"/>
-              <a:t>9/7/2025</a:t>
+              <a:t>8/30/2026</a:t>
             </a:fld>
             <a:endParaRPr lang="en-US" dirty="0"/>
           </a:p>
@@ -5111,7 +5111,7 @@
           <a:p>
             <a:fld id="{C764DE79-268F-4C1A-8933-263129D2AF90}" type="datetimeFigureOut">
               <a:rPr lang="en-US" dirty="0"/>
-              <a:t>9/7/2025</a:t>
+              <a:t>8/30/2026</a:t>
             </a:fld>
             <a:endParaRPr lang="en-US" dirty="0"/>
           </a:p>
@@ -5367,7 +5367,7 @@
           <a:p>
             <a:fld id="{C764DE79-268F-4C1A-8933-263129D2AF90}" type="datetimeFigureOut">
               <a:rPr lang="en-US" dirty="0"/>
-              <a:t>9/7/2025</a:t>
+              <a:t>8/30/2026</a:t>
             </a:fld>
             <a:endParaRPr lang="en-US" dirty="0"/>
           </a:p>
@@ -5609,7 +5609,7 @@
           <a:p>
             <a:fld id="{C764DE79-268F-4C1A-8933-263129D2AF90}" type="datetimeFigureOut">
               <a:rPr lang="en-US" dirty="0"/>
-              <a:t>9/7/2025</a:t>
+              <a:t>8/30/2026</a:t>
             </a:fld>
             <a:endParaRPr lang="en-US" dirty="0"/>
           </a:p>
@@ -5986,7 +5986,7 @@
           <a:p>
             <a:fld id="{C764DE79-268F-4C1A-8933-263129D2AF90}" type="datetimeFigureOut">
               <a:rPr lang="en-US" dirty="0"/>
-              <a:t>9/7/2025</a:t>
+              <a:t>8/30/2026</a:t>
             </a:fld>
             <a:endParaRPr lang="en-US" dirty="0"/>
           </a:p>
@@ -6114,7 +6114,7 @@
           <a:p>
             <a:fld id="{C764DE79-268F-4C1A-8933-263129D2AF90}" type="datetimeFigureOut">
               <a:rPr lang="en-US" dirty="0"/>
-              <a:t>9/7/2025</a:t>
+              <a:t>8/30/2026</a:t>
             </a:fld>
             <a:endParaRPr lang="en-US" dirty="0"/>
           </a:p>
@@ -6219,7 +6219,7 @@
           <a:p>
             <a:fld id="{C764DE79-268F-4C1A-8933-263129D2AF90}" type="datetimeFigureOut">
               <a:rPr lang="en-US" dirty="0"/>
-              <a:t>9/7/2025</a:t>
+              <a:t>8/30/2026</a:t>
             </a:fld>
             <a:endParaRPr lang="en-US" dirty="0"/>
           </a:p>
@@ -6506,7 +6506,7 @@
           <a:p>
             <a:fld id="{C764DE79-268F-4C1A-8933-263129D2AF90}" type="datetimeFigureOut">
               <a:rPr lang="en-US" dirty="0"/>
-              <a:t>9/7/2025</a:t>
+              <a:t>8/30/2026</a:t>
             </a:fld>
             <a:endParaRPr lang="en-US" dirty="0"/>
           </a:p>
@@ -6773,7 +6773,7 @@
           <a:p>
             <a:fld id="{C764DE79-268F-4C1A-8933-263129D2AF90}" type="datetimeFigureOut">
               <a:rPr lang="en-US" dirty="0"/>
-              <a:t>9/7/2025</a:t>
+              <a:t>8/30/2026</a:t>
             </a:fld>
             <a:endParaRPr lang="en-US" dirty="0"/>
           </a:p>
@@ -6996,7 +6996,7 @@
           <a:p>
             <a:fld id="{C764DE79-268F-4C1A-8933-263129D2AF90}" type="datetimeFigureOut">
               <a:rPr lang="en-US" dirty="0"/>
-              <a:t>9/7/2025</a:t>
+              <a:t>8/30/2026</a:t>
             </a:fld>
             <a:endParaRPr lang="en-US" dirty="0"/>
           </a:p>
@@ -12100,7 +12100,7 @@
         </p:nvSpPr>
         <p:spPr>
           <a:xfrm>
-            <a:off x="1638300" y="269875"/>
+            <a:off x="407368" y="260648"/>
             <a:ext cx="8915400" cy="1143000"/>
           </a:xfrm>
         </p:spPr>
@@ -12132,8 +12132,8 @@
         </p:nvSpPr>
         <p:spPr bwMode="auto">
           <a:xfrm>
-            <a:off x="1487489" y="1556793"/>
-            <a:ext cx="8643713" cy="5016758"/>
+            <a:off x="191344" y="1772816"/>
+            <a:ext cx="8643713" cy="4708981"/>
           </a:xfrm>
           <a:prstGeom prst="rect">
             <a:avLst/>
@@ -12479,84 +12479,25 @@
               <a:rPr lang="en-US" altLang="zh-CN" sz="2000" dirty="0">
                 <a:latin typeface="Arial" panose="020B0604020202020204" pitchFamily="34" charset="0"/>
               </a:rPr>
-              <a:t>Teacher Assistant</a:t>
-            </a:r>
-            <a:r>
-              <a:rPr lang="zh-CN" altLang="en-US" sz="2000" dirty="0">
+              <a:t>Teacher </a:t>
+            </a:r>
+            <a:r>
+              <a:rPr lang="en-US" altLang="zh-CN" sz="2000">
+                <a:latin typeface="Arial" panose="020B0604020202020204" pitchFamily="34" charset="0"/>
+              </a:rPr>
+              <a:t>Assistant</a:t>
+            </a:r>
+            <a:r>
+              <a:rPr lang="zh-CN" altLang="en-US" sz="2000">
                 <a:latin typeface="Arial" panose="020B0604020202020204" pitchFamily="34" charset="0"/>
               </a:rPr>
               <a:t>：</a:t>
             </a:r>
             <a:r>
-              <a:rPr lang="en-US" altLang="zh-CN" sz="2000" dirty="0" err="1">
+              <a:rPr lang="en-US" altLang="zh-CN" sz="2000">
                 <a:latin typeface="Arial" panose="020B0604020202020204" pitchFamily="34" charset="0"/>
               </a:rPr>
-              <a:t>Jiaxin</a:t>
-            </a:r>
-            <a:r>
-              <a:rPr lang="en-US" altLang="zh-CN" sz="2000" dirty="0">
-                <a:latin typeface="Arial" panose="020B0604020202020204" pitchFamily="34" charset="0"/>
-              </a:rPr>
-              <a:t> Xu</a:t>
-            </a:r>
-            <a:r>
-              <a:rPr lang="zh-CN" altLang="en-US" sz="2000" dirty="0">
-                <a:latin typeface="Arial" panose="020B0604020202020204" pitchFamily="34" charset="0"/>
-              </a:rPr>
-              <a:t>， </a:t>
-            </a:r>
-            <a:r>
-              <a:rPr lang="en-US" altLang="zh-CN" sz="2000" dirty="0" err="1">
-                <a:latin typeface="Arial" panose="020B0604020202020204" pitchFamily="34" charset="0"/>
-              </a:rPr>
-              <a:t>Jinpeng</a:t>
-            </a:r>
-            <a:r>
-              <a:rPr lang="en-US" altLang="zh-CN" sz="2000" dirty="0">
-                <a:latin typeface="Arial" panose="020B0604020202020204" pitchFamily="34" charset="0"/>
-              </a:rPr>
-              <a:t> Huang</a:t>
-            </a:r>
-            <a:r>
-              <a:rPr lang="zh-CN" altLang="en-US" sz="2000" dirty="0">
-                <a:latin typeface="Arial" panose="020B0604020202020204" pitchFamily="34" charset="0"/>
-              </a:rPr>
-              <a:t>，</a:t>
-            </a:r>
-            <a:r>
-              <a:rPr lang="en-US" altLang="zh-CN" sz="2000" dirty="0">
-                <a:latin typeface="Arial" panose="020B0604020202020204" pitchFamily="34" charset="0"/>
-              </a:rPr>
-              <a:t>Yan Luo</a:t>
-            </a:r>
-          </a:p>
-          <a:p>
-            <a:pPr>
-              <a:spcBef>
-                <a:spcPct val="0"/>
-              </a:spcBef>
-              <a:buClrTx/>
-              <a:buSzTx/>
-              <a:buFontTx/>
-              <a:buNone/>
-            </a:pPr>
-            <a:r>
-              <a:rPr lang="en-US" altLang="ja-JP" sz="2000" dirty="0">
-                <a:latin typeface="Arial" panose="020B0604020202020204" pitchFamily="34" charset="0"/>
-              </a:rPr>
-              <a:t>                                </a:t>
-            </a:r>
-            <a:r>
-              <a:rPr lang="en-US" altLang="zh-CN" sz="2000" dirty="0" err="1">
-                <a:latin typeface="Arial" panose="020B0604020202020204" pitchFamily="34" charset="0"/>
-              </a:rPr>
-              <a:t>Yangbin</a:t>
-            </a:r>
-            <a:r>
-              <a:rPr lang="en-US" altLang="zh-CN" sz="2000" dirty="0">
-                <a:latin typeface="Arial" panose="020B0604020202020204" pitchFamily="34" charset="0"/>
-              </a:rPr>
-              <a:t> Sun</a:t>
+              <a:t>7 students</a:t>
             </a:r>
             <a:endParaRPr lang="en-US" altLang="ja-JP" sz="2000" dirty="0">
               <a:latin typeface="Arial" panose="020B0604020202020204" pitchFamily="34" charset="0"/>
@@ -12636,17 +12577,20 @@
               <a:t>Course group number </a:t>
             </a:r>
             <a:r>
-              <a:rPr lang="zh-CN" altLang="en-US" sz="2000" dirty="0">
+              <a:rPr lang="zh-CN" altLang="en-US" sz="2000">
                 <a:latin typeface="Arial" panose="020B0604020202020204" pitchFamily="34" charset="0"/>
               </a:rPr>
               <a:t>： </a:t>
             </a:r>
             <a:r>
-              <a:rPr lang="en-US" altLang="zh-CN" sz="2000" dirty="0">
+              <a:rPr lang="en-US" altLang="zh-CN" sz="2000">
                 <a:latin typeface="Arial" panose="020B0604020202020204" pitchFamily="34" charset="0"/>
               </a:rPr>
-              <a:t>892362595</a:t>
-            </a:r>
+              <a:t>616842598</a:t>
+            </a:r>
+            <a:endParaRPr lang="en-US" altLang="zh-CN" sz="2000" dirty="0">
+              <a:latin typeface="Arial" panose="020B0604020202020204" pitchFamily="34" charset="0"/>
+            </a:endParaRPr>
           </a:p>
           <a:p>
             <a:pPr>
@@ -12777,10 +12721,10 @@
       </p:sp>
       <p:pic>
         <p:nvPicPr>
-          <p:cNvPr id="6" name="图片 5">
+          <p:cNvPr id="5" name="图片 4">
             <a:extLst>
               <a:ext uri="{FF2B5EF4-FFF2-40B4-BE49-F238E27FC236}">
-                <a16:creationId xmlns:a16="http://schemas.microsoft.com/office/drawing/2014/main" id="{32DD6599-139E-4A61-B76D-E04729DC93CA}"/>
+                <a16:creationId xmlns:a16="http://schemas.microsoft.com/office/drawing/2014/main" id="{9E9BA200-0A4E-67B3-B2BE-9690019925E9}"/>
               </a:ext>
             </a:extLst>
           </p:cNvPr>
@@ -12797,8 +12741,8 @@
         </p:blipFill>
         <p:spPr>
           <a:xfrm>
-            <a:off x="8184232" y="1196752"/>
-            <a:ext cx="3024336" cy="3799806"/>
+            <a:off x="7834206" y="908720"/>
+            <a:ext cx="3374362" cy="4176464"/>
           </a:xfrm>
           <a:prstGeom prst="rect">
             <a:avLst/>
@@ -14086,6 +14030,177 @@
 </file>
 
 <file path=ppt/slides/slide27.xml><?xml version="1.0" encoding="utf-8"?>
+<p:sld xmlns:a="http://schemas.openxmlformats.org/drawingml/2006/main" xmlns:r="http://schemas.openxmlformats.org/officeDocument/2006/relationships" xmlns:p="http://schemas.openxmlformats.org/presentationml/2006/main">
+  <p:cSld>
+    <p:spTree>
+      <p:nvGrpSpPr>
+        <p:cNvPr id="1" name=""/>
+        <p:cNvGrpSpPr/>
+        <p:nvPr/>
+      </p:nvGrpSpPr>
+      <p:grpSpPr>
+        <a:xfrm>
+          <a:off x="0" y="0"/>
+          <a:ext cx="0" cy="0"/>
+          <a:chOff x="0" y="0"/>
+          <a:chExt cx="0" cy="0"/>
+        </a:xfrm>
+      </p:grpSpPr>
+      <p:sp>
+        <p:nvSpPr>
+          <p:cNvPr id="11266" name="标题 1">
+            <a:extLst>
+              <a:ext uri="{FF2B5EF4-FFF2-40B4-BE49-F238E27FC236}">
+                <a16:creationId xmlns:a16="http://schemas.microsoft.com/office/drawing/2014/main" id="{E024DF8E-318C-4F05-A1D1-3EB5FB93ACCB}"/>
+              </a:ext>
+            </a:extLst>
+          </p:cNvPr>
+          <p:cNvSpPr>
+            <a:spLocks noGrp="1"/>
+          </p:cNvSpPr>
+          <p:nvPr>
+            <p:ph type="title"/>
+          </p:nvPr>
+        </p:nvSpPr>
+        <p:spPr/>
+        <p:txBody>
+          <a:bodyPr/>
+          <a:lstStyle/>
+          <a:p>
+            <a:r>
+              <a:rPr lang="en-US" altLang="zh-CN" dirty="0"/>
+              <a:t>1.6 Offline Programming</a:t>
+            </a:r>
+            <a:endParaRPr lang="zh-CN" altLang="en-US" dirty="0"/>
+          </a:p>
+        </p:txBody>
+      </p:sp>
+      <p:sp>
+        <p:nvSpPr>
+          <p:cNvPr id="3" name="内容占位符 2">
+            <a:extLst>
+              <a:ext uri="{FF2B5EF4-FFF2-40B4-BE49-F238E27FC236}">
+                <a16:creationId xmlns:a16="http://schemas.microsoft.com/office/drawing/2014/main" id="{051B46B3-FA05-49F3-B5B8-5120D9D2665F}"/>
+              </a:ext>
+            </a:extLst>
+          </p:cNvPr>
+          <p:cNvSpPr>
+            <a:spLocks noGrp="1"/>
+          </p:cNvSpPr>
+          <p:nvPr>
+            <p:ph idx="1"/>
+          </p:nvPr>
+        </p:nvSpPr>
+        <p:spPr>
+          <a:xfrm>
+            <a:off x="767408" y="1484784"/>
+            <a:ext cx="10515600" cy="4351338"/>
+          </a:xfrm>
+        </p:spPr>
+        <p:txBody>
+          <a:bodyPr/>
+          <a:lstStyle/>
+          <a:p>
+            <a:pPr>
+              <a:defRPr/>
+            </a:pPr>
+            <a:r>
+              <a:rPr lang="en-US" altLang="zh-CN"/>
+              <a:t>You can use LLMs to help you (e.g., codex, opencode)</a:t>
+            </a:r>
+            <a:endParaRPr lang="en-US" altLang="zh-CN" dirty="0"/>
+          </a:p>
+          <a:p>
+            <a:pPr>
+              <a:defRPr/>
+            </a:pPr>
+            <a:endParaRPr lang="en-US" altLang="zh-CN" dirty="0"/>
+          </a:p>
+          <a:p>
+            <a:pPr>
+              <a:defRPr/>
+            </a:pPr>
+            <a:endParaRPr lang="en-US" altLang="zh-CN" dirty="0"/>
+          </a:p>
+          <a:p>
+            <a:pPr>
+              <a:defRPr/>
+            </a:pPr>
+            <a:endParaRPr lang="en-US" altLang="zh-CN" dirty="0"/>
+          </a:p>
+          <a:p>
+            <a:pPr marL="0" indent="0">
+              <a:buNone/>
+              <a:defRPr/>
+            </a:pPr>
+            <a:endParaRPr lang="en-US" altLang="zh-CN" dirty="0"/>
+          </a:p>
+          <a:p>
+            <a:pPr marL="0" indent="0">
+              <a:buNone/>
+              <a:defRPr/>
+            </a:pPr>
+            <a:r>
+              <a:rPr lang="en-US" altLang="zh-CN" dirty="0"/>
+              <a:t>        </a:t>
+            </a:r>
+          </a:p>
+          <a:p>
+            <a:pPr marL="0" indent="0">
+              <a:buNone/>
+              <a:defRPr/>
+            </a:pPr>
+            <a:r>
+              <a:rPr lang="en-US" altLang="zh-CN" dirty="0"/>
+              <a:t> </a:t>
+            </a:r>
+          </a:p>
+        </p:txBody>
+      </p:sp>
+      <p:pic>
+        <p:nvPicPr>
+          <p:cNvPr id="6" name="图片 5">
+            <a:extLst>
+              <a:ext uri="{FF2B5EF4-FFF2-40B4-BE49-F238E27FC236}">
+                <a16:creationId xmlns:a16="http://schemas.microsoft.com/office/drawing/2014/main" id="{A2D8D7A6-F180-98F7-6A72-B6FA57AE1176}"/>
+              </a:ext>
+            </a:extLst>
+          </p:cNvPr>
+          <p:cNvPicPr>
+            <a:picLocks noChangeAspect="1"/>
+          </p:cNvPicPr>
+          <p:nvPr/>
+        </p:nvPicPr>
+        <p:blipFill>
+          <a:blip r:embed="rId3"/>
+          <a:stretch>
+            <a:fillRect/>
+          </a:stretch>
+        </p:blipFill>
+        <p:spPr>
+          <a:xfrm>
+            <a:off x="1199456" y="2132856"/>
+            <a:ext cx="8640960" cy="4644516"/>
+          </a:xfrm>
+          <a:prstGeom prst="rect">
+            <a:avLst/>
+          </a:prstGeom>
+        </p:spPr>
+      </p:pic>
+    </p:spTree>
+    <p:extLst>
+      <p:ext uri="{BB962C8B-B14F-4D97-AF65-F5344CB8AC3E}">
+        <p14:creationId xmlns:p14="http://schemas.microsoft.com/office/powerpoint/2010/main" val="4118685159"/>
+      </p:ext>
+    </p:extLst>
+  </p:cSld>
+  <p:clrMapOvr>
+    <a:masterClrMapping/>
+  </p:clrMapOvr>
+</p:sld>
+</file>
+
+<file path=ppt/slides/slide28.xml><?xml version="1.0" encoding="utf-8"?>
 <p:sld xmlns:a="http://schemas.openxmlformats.org/drawingml/2006/main" xmlns:r="http://schemas.openxmlformats.org/officeDocument/2006/relationships" xmlns:p="http://schemas.openxmlformats.org/presentationml/2006/main">
   <p:cSld>
     <p:bg>
@@ -14841,7 +14956,7 @@
 </p:sld>
 </file>
 
-<file path=ppt/slides/slide28.xml><?xml version="1.0" encoding="utf-8"?>
+<file path=ppt/slides/slide29.xml><?xml version="1.0" encoding="utf-8"?>
 <p:sld xmlns:a="http://schemas.openxmlformats.org/drawingml/2006/main" xmlns:r="http://schemas.openxmlformats.org/officeDocument/2006/relationships" xmlns:p="http://schemas.openxmlformats.org/presentationml/2006/main" showMasterPhAnim="0">
   <p:cSld>
     <p:bg>
@@ -16481,12 +16596,12 @@
             <a:graphicData uri="http://schemas.openxmlformats.org/presentationml/2006/ole">
               <mc:AlternateContent xmlns:mc="http://schemas.openxmlformats.org/markup-compatibility/2006">
                 <mc:Choice xmlns:v="urn:schemas-microsoft-com:vml" Requires="v">
-                  <p:oleObj spid="_x0000_s63691" r:id="rId3" imgW="771429" imgH="714286" progId="">
+                  <p:oleObj r:id="rId2" imgW="771429" imgH="714286" progId="">
                     <p:embed/>
                   </p:oleObj>
                 </mc:Choice>
                 <mc:Fallback>
-                  <p:oleObj r:id="rId3" imgW="771429" imgH="714286" progId="">
+                  <p:oleObj r:id="rId2" imgW="771429" imgH="714286" progId="">
                     <p:embed/>
                     <p:pic>
                       <p:nvPicPr>
@@ -16497,7 +16612,7 @@
                         <p:nvPr/>
                       </p:nvPicPr>
                       <p:blipFill>
-                        <a:blip r:embed="rId4">
+                        <a:blip r:embed="rId3">
                           <a:extLst>
                             <a:ext uri="{28A0092B-C50C-407E-A947-70E740481C1C}">
                               <a14:useLocalDpi xmlns:a14="http://schemas.microsoft.com/office/drawing/2010/main" val="0"/>
@@ -32900,164 +33015,6 @@
 </p:sld>
 </file>
 
-<file path=ppt/slides/slide29.xml><?xml version="1.0" encoding="utf-8"?>
-<p:sld xmlns:a="http://schemas.openxmlformats.org/drawingml/2006/main" xmlns:r="http://schemas.openxmlformats.org/officeDocument/2006/relationships" xmlns:p="http://schemas.openxmlformats.org/presentationml/2006/main">
-  <p:cSld>
-    <p:bg>
-      <p:bgPr>
-        <a:solidFill>
-          <a:schemeClr val="accent6">
-            <a:lumMod val="20000"/>
-            <a:lumOff val="80000"/>
-            <a:alpha val="50000"/>
-          </a:schemeClr>
-        </a:solidFill>
-        <a:effectLst/>
-      </p:bgPr>
-    </p:bg>
-    <p:spTree>
-      <p:nvGrpSpPr>
-        <p:cNvPr id="1" name=""/>
-        <p:cNvGrpSpPr/>
-        <p:nvPr/>
-      </p:nvGrpSpPr>
-      <p:grpSpPr>
-        <a:xfrm>
-          <a:off x="0" y="0"/>
-          <a:ext cx="0" cy="0"/>
-          <a:chOff x="0" y="0"/>
-          <a:chExt cx="0" cy="0"/>
-        </a:xfrm>
-      </p:grpSpPr>
-      <p:sp>
-        <p:nvSpPr>
-          <p:cNvPr id="64514" name="标题 1">
-            <a:extLst>
-              <a:ext uri="{FF2B5EF4-FFF2-40B4-BE49-F238E27FC236}">
-                <a16:creationId xmlns:a16="http://schemas.microsoft.com/office/drawing/2014/main" id="{9EF75847-7490-4D78-A343-76AA3BEB94B9}"/>
-              </a:ext>
-            </a:extLst>
-          </p:cNvPr>
-          <p:cNvSpPr>
-            <a:spLocks noGrp="1" noChangeArrowheads="1"/>
-          </p:cNvSpPr>
-          <p:nvPr>
-            <p:ph type="title"/>
-          </p:nvPr>
-        </p:nvSpPr>
-        <p:spPr>
-          <a:xfrm>
-            <a:off x="1638300" y="269875"/>
-            <a:ext cx="8915400" cy="1143000"/>
-          </a:xfrm>
-        </p:spPr>
-        <p:txBody>
-          <a:bodyPr/>
-          <a:lstStyle/>
-          <a:p>
-            <a:r>
-              <a:rPr lang="en-US" altLang="zh-CN" dirty="0"/>
-              <a:t>Homework</a:t>
-            </a:r>
-            <a:endParaRPr lang="zh-CN" altLang="en-US" dirty="0"/>
-          </a:p>
-        </p:txBody>
-      </p:sp>
-      <p:sp>
-        <p:nvSpPr>
-          <p:cNvPr id="64515" name="内容占位符 2">
-            <a:extLst>
-              <a:ext uri="{FF2B5EF4-FFF2-40B4-BE49-F238E27FC236}">
-                <a16:creationId xmlns:a16="http://schemas.microsoft.com/office/drawing/2014/main" id="{8D6138D7-DBD7-457D-86CA-7FDB7B6A4C29}"/>
-              </a:ext>
-            </a:extLst>
-          </p:cNvPr>
-          <p:cNvSpPr>
-            <a:spLocks noGrp="1" noChangeArrowheads="1"/>
-          </p:cNvSpPr>
-          <p:nvPr>
-            <p:ph idx="1"/>
-          </p:nvPr>
-        </p:nvSpPr>
-        <p:spPr>
-          <a:xfrm>
-            <a:off x="1625600" y="1412875"/>
-            <a:ext cx="8915400" cy="4686300"/>
-          </a:xfrm>
-        </p:spPr>
-        <p:txBody>
-          <a:bodyPr/>
-          <a:lstStyle/>
-          <a:p>
-            <a:r>
-              <a:rPr lang="en-US" altLang="zh-CN" dirty="0"/>
-              <a:t>1. How to develop a C++ program?</a:t>
-            </a:r>
-            <a:endParaRPr lang="zh-CN" altLang="zh-CN" dirty="0"/>
-          </a:p>
-          <a:p>
-            <a:r>
-              <a:rPr lang="en-US" altLang="zh-CN" dirty="0"/>
-              <a:t>2. Use </a:t>
-            </a:r>
-            <a:r>
-              <a:rPr lang="en-US" altLang="zh-CN" dirty="0" err="1"/>
-              <a:t>CodeBlocks</a:t>
-            </a:r>
-            <a:r>
-              <a:rPr lang="en-US" altLang="zh-CN" dirty="0"/>
-              <a:t>, Visual Studio Code or online  programming to write a C++ program: </a:t>
-            </a:r>
-          </a:p>
-          <a:p>
-            <a:pPr marL="0" indent="0">
-              <a:buNone/>
-            </a:pPr>
-            <a:r>
-              <a:rPr lang="en-US" altLang="zh-CN" dirty="0"/>
-              <a:t>    Display the following two sentences on the screen:</a:t>
-            </a:r>
-          </a:p>
-          <a:p>
-            <a:pPr marL="0" indent="0">
-              <a:buNone/>
-            </a:pPr>
-            <a:r>
-              <a:rPr lang="en-US" altLang="zh-CN" dirty="0"/>
-              <a:t>        Hello C++.</a:t>
-            </a:r>
-          </a:p>
-          <a:p>
-            <a:pPr marL="0" indent="0">
-              <a:buNone/>
-            </a:pPr>
-            <a:r>
-              <a:rPr lang="en-US" altLang="zh-CN" dirty="0"/>
-              <a:t>        I like programming.</a:t>
-            </a:r>
-          </a:p>
-          <a:p>
-            <a:pPr marL="0" indent="0">
-              <a:buNone/>
-            </a:pPr>
-            <a:r>
-              <a:rPr lang="en-US" altLang="zh-CN" dirty="0"/>
-              <a:t>    The output is formatted as two lines.</a:t>
-            </a:r>
-          </a:p>
-          <a:p>
-            <a:endParaRPr lang="zh-CN" altLang="en-US" dirty="0"/>
-          </a:p>
-        </p:txBody>
-      </p:sp>
-    </p:spTree>
-  </p:cSld>
-  <p:clrMapOvr>
-    <a:masterClrMapping/>
-  </p:clrMapOvr>
-</p:sld>
-</file>
-
 <file path=ppt/slides/slide3.xml><?xml version="1.0" encoding="utf-8"?>
 <p:sld xmlns:a="http://schemas.openxmlformats.org/drawingml/2006/main" xmlns:r="http://schemas.openxmlformats.org/officeDocument/2006/relationships" xmlns:p="http://schemas.openxmlformats.org/presentationml/2006/main">
   <p:cSld>
